--- a/2026-Q2/0-Introduction/RomansIntro.pptx
+++ b/2026-Q2/0-Introduction/RomansIntro.pptx
@@ -6733,7 +6733,7 @@
         <p:spPr/>
         <p:txBody>
           <a:bodyPr>
-            <a:normAutofit fontScale="77500" lnSpcReduction="20000"/>
+            <a:normAutofit fontScale="92500" lnSpcReduction="20000"/>
           </a:bodyPr>
           <a:lstStyle/>
           <a:p>
@@ -7657,7 +7657,7 @@
         <p:spPr/>
         <p:txBody>
           <a:bodyPr>
-            <a:normAutofit fontScale="85000" lnSpcReduction="20000"/>
+            <a:normAutofit fontScale="92500" lnSpcReduction="10000"/>
           </a:bodyPr>
           <a:lstStyle/>
           <a:p>
@@ -9769,7 +9769,12 @@
             <p:ph type="ctrTitle"/>
           </p:nvPr>
         </p:nvSpPr>
-        <p:spPr/>
+        <p:spPr>
+          <a:xfrm>
+            <a:off x="685800" y="2183448"/>
+            <a:ext cx="7772400" cy="1470025"/>
+          </a:xfrm>
+        </p:spPr>
         <p:txBody>
           <a:bodyPr/>
           <a:lstStyle/>
@@ -9793,27 +9798,63 @@
             <p:ph type="subTitle" idx="1"/>
           </p:nvPr>
         </p:nvSpPr>
-        <p:spPr/>
+        <p:spPr>
+          <a:xfrm>
+            <a:off x="1371600" y="3423920"/>
+            <a:ext cx="6400800" cy="1219200"/>
+          </a:xfrm>
+        </p:spPr>
         <p:txBody>
           <a:bodyPr/>
           <a:lstStyle/>
           <a:p>
             <a:pPr eaLnBrk="1" hangingPunct="1"/>
             <a:r>
-              <a:rPr lang="en-US" dirty="0"/>
+              <a:rPr lang="en-US" sz="3600" dirty="0"/>
               <a:t>Introduction</a:t>
             </a:r>
           </a:p>
           <a:p>
             <a:pPr eaLnBrk="1" hangingPunct="1"/>
             <a:r>
-              <a:rPr lang="en-US" dirty="0"/>
+              <a:rPr lang="en-US" sz="3600" dirty="0"/>
               <a:t>1:1-17</a:t>
             </a:r>
           </a:p>
-          <a:p>
-            <a:pPr eaLnBrk="1" hangingPunct="1"/>
-            <a:endParaRPr lang="en-US" dirty="0"/>
+        </p:txBody>
+      </p:sp>
+      <p:sp>
+        <p:nvSpPr>
+          <p:cNvPr id="3" name="TextBox 2">
+            <a:extLst>
+              <a:ext uri="{FF2B5EF4-FFF2-40B4-BE49-F238E27FC236}">
+                <a16:creationId xmlns:a16="http://schemas.microsoft.com/office/drawing/2014/main" id="{7772BF63-7603-E1C6-F18F-F082D8EF0585}"/>
+              </a:ext>
+            </a:extLst>
+          </p:cNvPr>
+          <p:cNvSpPr txBox="1"/>
+          <p:nvPr/>
+        </p:nvSpPr>
+        <p:spPr>
+          <a:xfrm>
+            <a:off x="2286000" y="5652759"/>
+            <a:ext cx="4572000" cy="461665"/>
+          </a:xfrm>
+          <a:prstGeom prst="rect">
+            <a:avLst/>
+          </a:prstGeom>
+          <a:noFill/>
+        </p:spPr>
+        <p:txBody>
+          <a:bodyPr wrap="square">
+            <a:spAutoFit/>
+          </a:bodyPr>
+          <a:lstStyle/>
+          <a:p>
+            <a:r>
+              <a:rPr lang="en-US" sz="2400" dirty="0"/>
+              <a:t>https://tinyurl.com/RomeGospel</a:t>
+            </a:r>
           </a:p>
         </p:txBody>
       </p:sp>
